--- a/All The Earth Will Sing Your Praise_chords.pptx
+++ b/All The Earth Will Sing Your Praise_chords.pptx
@@ -8,12 +8,10 @@
     <p:sldId id="256" r:id="rId2"/>
     <p:sldId id="284" r:id="rId3"/>
     <p:sldId id="290" r:id="rId4"/>
-    <p:sldId id="291" r:id="rId5"/>
-    <p:sldId id="276" r:id="rId6"/>
-    <p:sldId id="292" r:id="rId7"/>
-    <p:sldId id="293" r:id="rId8"/>
-    <p:sldId id="294" r:id="rId9"/>
-    <p:sldId id="295" r:id="rId10"/>
+    <p:sldId id="276" r:id="rId5"/>
+    <p:sldId id="292" r:id="rId6"/>
+    <p:sldId id="293" r:id="rId7"/>
+    <p:sldId id="294" r:id="rId8"/>
   </p:sldIdLst>
   <p:sldSz cx="12192000" cy="6858000"/>
   <p:notesSz cx="6858000" cy="9144000"/>
@@ -267,7 +265,7 @@
           <a:p>
             <a:fld id="{E759A0DE-F190-5444-87AC-4719D5F20D15}" type="datetimeFigureOut">
               <a:rPr lang="en-US" smtClean="0"/>
-              <a:t>3/31/26</a:t>
+              <a:t>4/3/26</a:t>
             </a:fld>
             <a:endParaRPr lang="en-US"/>
           </a:p>
@@ -465,7 +463,7 @@
           <a:p>
             <a:fld id="{E759A0DE-F190-5444-87AC-4719D5F20D15}" type="datetimeFigureOut">
               <a:rPr lang="en-US" smtClean="0"/>
-              <a:t>3/31/26</a:t>
+              <a:t>4/3/26</a:t>
             </a:fld>
             <a:endParaRPr lang="en-US"/>
           </a:p>
@@ -673,7 +671,7 @@
           <a:p>
             <a:fld id="{E759A0DE-F190-5444-87AC-4719D5F20D15}" type="datetimeFigureOut">
               <a:rPr lang="en-US" smtClean="0"/>
-              <a:t>3/31/26</a:t>
+              <a:t>4/3/26</a:t>
             </a:fld>
             <a:endParaRPr lang="en-US"/>
           </a:p>
@@ -871,7 +869,7 @@
           <a:p>
             <a:fld id="{E759A0DE-F190-5444-87AC-4719D5F20D15}" type="datetimeFigureOut">
               <a:rPr lang="en-US" smtClean="0"/>
-              <a:t>3/31/26</a:t>
+              <a:t>4/3/26</a:t>
             </a:fld>
             <a:endParaRPr lang="en-US"/>
           </a:p>
@@ -1146,7 +1144,7 @@
           <a:p>
             <a:fld id="{E759A0DE-F190-5444-87AC-4719D5F20D15}" type="datetimeFigureOut">
               <a:rPr lang="en-US" smtClean="0"/>
-              <a:t>3/31/26</a:t>
+              <a:t>4/3/26</a:t>
             </a:fld>
             <a:endParaRPr lang="en-US"/>
           </a:p>
@@ -1411,7 +1409,7 @@
           <a:p>
             <a:fld id="{E759A0DE-F190-5444-87AC-4719D5F20D15}" type="datetimeFigureOut">
               <a:rPr lang="en-US" smtClean="0"/>
-              <a:t>3/31/26</a:t>
+              <a:t>4/3/26</a:t>
             </a:fld>
             <a:endParaRPr lang="en-US"/>
           </a:p>
@@ -1823,7 +1821,7 @@
           <a:p>
             <a:fld id="{E759A0DE-F190-5444-87AC-4719D5F20D15}" type="datetimeFigureOut">
               <a:rPr lang="en-US" smtClean="0"/>
-              <a:t>3/31/26</a:t>
+              <a:t>4/3/26</a:t>
             </a:fld>
             <a:endParaRPr lang="en-US"/>
           </a:p>
@@ -1964,7 +1962,7 @@
           <a:p>
             <a:fld id="{E759A0DE-F190-5444-87AC-4719D5F20D15}" type="datetimeFigureOut">
               <a:rPr lang="en-US" smtClean="0"/>
-              <a:t>3/31/26</a:t>
+              <a:t>4/3/26</a:t>
             </a:fld>
             <a:endParaRPr lang="en-US"/>
           </a:p>
@@ -2077,7 +2075,7 @@
           <a:p>
             <a:fld id="{E759A0DE-F190-5444-87AC-4719D5F20D15}" type="datetimeFigureOut">
               <a:rPr lang="en-US" smtClean="0"/>
-              <a:t>3/31/26</a:t>
+              <a:t>4/3/26</a:t>
             </a:fld>
             <a:endParaRPr lang="en-US"/>
           </a:p>
@@ -2388,7 +2386,7 @@
           <a:p>
             <a:fld id="{E759A0DE-F190-5444-87AC-4719D5F20D15}" type="datetimeFigureOut">
               <a:rPr lang="en-US" smtClean="0"/>
-              <a:t>3/31/26</a:t>
+              <a:t>4/3/26</a:t>
             </a:fld>
             <a:endParaRPr lang="en-US"/>
           </a:p>
@@ -2676,7 +2674,7 @@
           <a:p>
             <a:fld id="{E759A0DE-F190-5444-87AC-4719D5F20D15}" type="datetimeFigureOut">
               <a:rPr lang="en-US" smtClean="0"/>
-              <a:t>3/31/26</a:t>
+              <a:t>4/3/26</a:t>
             </a:fld>
             <a:endParaRPr lang="en-US"/>
           </a:p>
@@ -2917,7 +2915,7 @@
           <a:p>
             <a:fld id="{E759A0DE-F190-5444-87AC-4719D5F20D15}" type="datetimeFigureOut">
               <a:rPr lang="en-US" smtClean="0"/>
-              <a:t>3/31/26</a:t>
+              <a:t>4/3/26</a:t>
             </a:fld>
             <a:endParaRPr lang="en-US"/>
           </a:p>
@@ -3910,6 +3908,43 @@
             </a:endParaRPr>
           </a:p>
           <a:p>
+            <a:pPr algn="l"/>
+            <a:r>
+              <a:rPr lang="en-US" sz="3600" dirty="0">
+                <a:solidFill>
+                  <a:srgbClr val="FFFF00"/>
+                </a:solidFill>
+                <a:latin typeface="Avenir Medium" panose="02000503020000020003" pitchFamily="2" charset="0"/>
+                <a:ea typeface="Bodoni Ornaments" pitchFamily="2" charset="0"/>
+              </a:rPr>
+              <a:t>D                 A</a:t>
+            </a:r>
+          </a:p>
+          <a:p>
+            <a:pPr algn="l"/>
+            <a:r>
+              <a:rPr lang="en-US" sz="4400" dirty="0">
+                <a:solidFill>
+                  <a:schemeClr val="bg1"/>
+                </a:solidFill>
+                <a:latin typeface="Avenir Medium" panose="02000503020000020003" pitchFamily="2" charset="0"/>
+                <a:ea typeface="Bodoni Ornaments" pitchFamily="2" charset="0"/>
+              </a:rPr>
+              <a:t>You lived, You died, </a:t>
+            </a:r>
+          </a:p>
+          <a:p>
+            <a:pPr algn="l"/>
+            <a:r>
+              <a:rPr lang="en-US" sz="4400" dirty="0">
+                <a:solidFill>
+                  <a:srgbClr val="FFFF00"/>
+                </a:solidFill>
+                <a:latin typeface="Avenir Medium" panose="02000503020000020003" pitchFamily="2" charset="0"/>
+                <a:ea typeface="Bodoni Ornaments" pitchFamily="2" charset="0"/>
+              </a:rPr>
+              <a:t>Bm             G                                D</a:t>
+            </a:r>
             <a:endParaRPr lang="en-US" sz="4400" dirty="0">
               <a:solidFill>
                 <a:schemeClr val="bg1"/>
@@ -3919,18 +3954,7 @@
             </a:endParaRPr>
           </a:p>
           <a:p>
-            <a:r>
-              <a:rPr lang="en-US" sz="4400" dirty="0">
-                <a:solidFill>
-                  <a:schemeClr val="bg1"/>
-                </a:solidFill>
-                <a:latin typeface="Avenir Medium" panose="02000503020000020003" pitchFamily="2" charset="0"/>
-                <a:ea typeface="Bodoni Ornaments" pitchFamily="2" charset="0"/>
-              </a:rPr>
-              <a:t>You lived, You died, </a:t>
-            </a:r>
-          </a:p>
-          <a:p>
+            <a:pPr algn="l"/>
             <a:r>
               <a:rPr lang="en-US" sz="4400" dirty="0">
                 <a:solidFill>
@@ -3943,6 +3967,17 @@
             </a:r>
           </a:p>
           <a:p>
+            <a:pPr algn="l"/>
+            <a:r>
+              <a:rPr lang="en-US" sz="4400" dirty="0">
+                <a:solidFill>
+                  <a:srgbClr val="FFFF00"/>
+                </a:solidFill>
+                <a:latin typeface="Avenir Medium" panose="02000503020000020003" pitchFamily="2" charset="0"/>
+                <a:ea typeface="Bodoni Ornaments" pitchFamily="2" charset="0"/>
+              </a:rPr>
+              <a:t>       A                Bm     D</a:t>
+            </a:r>
             <a:endParaRPr lang="en-US" sz="4400" dirty="0">
               <a:solidFill>
                 <a:schemeClr val="bg1"/>
@@ -3952,6 +3987,7 @@
             </a:endParaRPr>
           </a:p>
           <a:p>
+            <a:pPr algn="l"/>
             <a:r>
               <a:rPr lang="en-US" sz="4400" dirty="0">
                 <a:solidFill>
@@ -4039,6 +4075,139 @@
           </a:bodyPr>
           <a:lstStyle/>
           <a:p>
+            <a:pPr algn="l"/>
+            <a:r>
+              <a:rPr lang="en-US" sz="3600" dirty="0">
+                <a:solidFill>
+                  <a:srgbClr val="FFFF00"/>
+                </a:solidFill>
+                <a:latin typeface="Avenir Medium" panose="02000503020000020003" pitchFamily="2" charset="0"/>
+                <a:ea typeface="Bodoni Ornaments" pitchFamily="2" charset="0"/>
+              </a:rPr>
+              <a:t>D                A</a:t>
+            </a:r>
+            <a:endParaRPr lang="en-US" sz="3600" dirty="0">
+              <a:solidFill>
+                <a:schemeClr val="bg1"/>
+              </a:solidFill>
+              <a:latin typeface="Avenir Medium" panose="02000503020000020003" pitchFamily="2" charset="0"/>
+              <a:ea typeface="Bodoni Ornaments" pitchFamily="2" charset="0"/>
+            </a:endParaRPr>
+          </a:p>
+          <a:p>
+            <a:pPr algn="l"/>
+            <a:r>
+              <a:rPr lang="en-US" sz="4400" dirty="0">
+                <a:solidFill>
+                  <a:schemeClr val="bg1"/>
+                </a:solidFill>
+                <a:latin typeface="Avenir Medium" panose="02000503020000020003" pitchFamily="2" charset="0"/>
+                <a:ea typeface="Bodoni Ornaments" pitchFamily="2" charset="0"/>
+              </a:rPr>
+              <a:t>You rule, You reign</a:t>
+            </a:r>
+          </a:p>
+          <a:p>
+            <a:pPr algn="l"/>
+            <a:r>
+              <a:rPr lang="en-US" sz="3600" dirty="0">
+                <a:solidFill>
+                  <a:srgbClr val="FFFF00"/>
+                </a:solidFill>
+                <a:latin typeface="Avenir Medium" panose="02000503020000020003" pitchFamily="2" charset="0"/>
+                <a:ea typeface="Bodoni Ornaments" pitchFamily="2" charset="0"/>
+              </a:rPr>
+              <a:t>Bm                         G</a:t>
+            </a:r>
+            <a:endParaRPr lang="en-US" sz="3600" dirty="0">
+              <a:solidFill>
+                <a:schemeClr val="bg1"/>
+              </a:solidFill>
+              <a:latin typeface="Avenir Medium" panose="02000503020000020003" pitchFamily="2" charset="0"/>
+              <a:ea typeface="Bodoni Ornaments" pitchFamily="2" charset="0"/>
+            </a:endParaRPr>
+          </a:p>
+          <a:p>
+            <a:pPr algn="l"/>
+            <a:r>
+              <a:rPr lang="en-US" sz="4400" dirty="0">
+                <a:solidFill>
+                  <a:schemeClr val="bg1"/>
+                </a:solidFill>
+                <a:latin typeface="Avenir Medium" panose="02000503020000020003" pitchFamily="2" charset="0"/>
+                <a:ea typeface="Bodoni Ornaments" pitchFamily="2" charset="0"/>
+              </a:rPr>
+              <a:t>You said You're coming back again</a:t>
+            </a:r>
+          </a:p>
+          <a:p>
+            <a:pPr algn="l"/>
+            <a:r>
+              <a:rPr lang="en-US" sz="3600" dirty="0">
+                <a:solidFill>
+                  <a:srgbClr val="FFFF00"/>
+                </a:solidFill>
+                <a:latin typeface="Avenir Medium" panose="02000503020000020003" pitchFamily="2" charset="0"/>
+                <a:ea typeface="Bodoni Ornaments" pitchFamily="2" charset="0"/>
+              </a:rPr>
+              <a:t>D            A</a:t>
+            </a:r>
+            <a:endParaRPr lang="en-US" sz="3600" dirty="0">
+              <a:solidFill>
+                <a:schemeClr val="bg1"/>
+              </a:solidFill>
+              <a:latin typeface="Avenir Medium" panose="02000503020000020003" pitchFamily="2" charset="0"/>
+              <a:ea typeface="Bodoni Ornaments" pitchFamily="2" charset="0"/>
+            </a:endParaRPr>
+          </a:p>
+          <a:p>
+            <a:pPr algn="l"/>
+            <a:r>
+              <a:rPr lang="en-US" sz="4400" dirty="0">
+                <a:solidFill>
+                  <a:schemeClr val="bg1"/>
+                </a:solidFill>
+                <a:latin typeface="Avenir Medium" panose="02000503020000020003" pitchFamily="2" charset="0"/>
+                <a:ea typeface="Bodoni Ornaments" pitchFamily="2" charset="0"/>
+              </a:rPr>
+              <a:t>I know You will</a:t>
+            </a:r>
+          </a:p>
+          <a:p>
+            <a:pPr algn="l"/>
+            <a:r>
+              <a:rPr lang="en-US" sz="3600" dirty="0">
+                <a:solidFill>
+                  <a:srgbClr val="FFFF00"/>
+                </a:solidFill>
+                <a:latin typeface="Avenir Medium" panose="02000503020000020003" pitchFamily="2" charset="0"/>
+                <a:ea typeface="Bodoni Ornaments" pitchFamily="2" charset="0"/>
+              </a:rPr>
+              <a:t>Em                            G                             D A Bm G</a:t>
+            </a:r>
+            <a:endParaRPr lang="en-US" sz="3600" dirty="0">
+              <a:solidFill>
+                <a:schemeClr val="bg1"/>
+              </a:solidFill>
+              <a:latin typeface="Avenir Medium" panose="02000503020000020003" pitchFamily="2" charset="0"/>
+              <a:ea typeface="Bodoni Ornaments" pitchFamily="2" charset="0"/>
+            </a:endParaRPr>
+          </a:p>
+          <a:p>
+            <a:pPr algn="l"/>
+            <a:r>
+              <a:rPr lang="en-US" sz="4400" dirty="0">
+                <a:solidFill>
+                  <a:schemeClr val="bg1"/>
+                </a:solidFill>
+                <a:latin typeface="Avenir Medium" panose="02000503020000020003" pitchFamily="2" charset="0"/>
+                <a:ea typeface="Bodoni Ornaments" pitchFamily="2" charset="0"/>
+              </a:rPr>
+              <a:t>All the earth will sing Your praises</a:t>
+            </a:r>
+          </a:p>
+          <a:p>
+            <a:pPr algn="l"/>
             <a:endParaRPr lang="en-US" sz="4400" dirty="0">
               <a:solidFill>
                 <a:schemeClr val="bg1"/>
@@ -4046,60 +4215,6 @@
               <a:latin typeface="Avenir Medium" panose="02000503020000020003" pitchFamily="2" charset="0"/>
               <a:ea typeface="Bodoni Ornaments" pitchFamily="2" charset="0"/>
             </a:endParaRPr>
-          </a:p>
-          <a:p>
-            <a:endParaRPr lang="en-US" sz="4400" dirty="0">
-              <a:solidFill>
-                <a:schemeClr val="bg1"/>
-              </a:solidFill>
-              <a:latin typeface="Avenir Medium" panose="02000503020000020003" pitchFamily="2" charset="0"/>
-              <a:ea typeface="Bodoni Ornaments" pitchFamily="2" charset="0"/>
-            </a:endParaRPr>
-          </a:p>
-          <a:p>
-            <a:r>
-              <a:rPr lang="en-US" sz="4400" dirty="0">
-                <a:solidFill>
-                  <a:schemeClr val="bg1"/>
-                </a:solidFill>
-                <a:latin typeface="Avenir Medium" panose="02000503020000020003" pitchFamily="2" charset="0"/>
-                <a:ea typeface="Bodoni Ornaments" pitchFamily="2" charset="0"/>
-              </a:rPr>
-              <a:t>You rule, You reign</a:t>
-            </a:r>
-          </a:p>
-          <a:p>
-            <a:r>
-              <a:rPr lang="en-US" sz="4400" dirty="0">
-                <a:solidFill>
-                  <a:schemeClr val="bg1"/>
-                </a:solidFill>
-                <a:latin typeface="Avenir Medium" panose="02000503020000020003" pitchFamily="2" charset="0"/>
-                <a:ea typeface="Bodoni Ornaments" pitchFamily="2" charset="0"/>
-              </a:rPr>
-              <a:t>You said You're coming back again</a:t>
-            </a:r>
-          </a:p>
-          <a:p>
-            <a:endParaRPr lang="en-US" sz="4400" dirty="0">
-              <a:solidFill>
-                <a:schemeClr val="bg1"/>
-              </a:solidFill>
-              <a:latin typeface="Avenir Medium" panose="02000503020000020003" pitchFamily="2" charset="0"/>
-              <a:ea typeface="Bodoni Ornaments" pitchFamily="2" charset="0"/>
-            </a:endParaRPr>
-          </a:p>
-          <a:p>
-            <a:r>
-              <a:rPr lang="en-US" sz="4400" dirty="0">
-                <a:solidFill>
-                  <a:schemeClr val="bg1"/>
-                </a:solidFill>
-                <a:latin typeface="Avenir Medium" panose="02000503020000020003" pitchFamily="2" charset="0"/>
-                <a:ea typeface="Bodoni Ornaments" pitchFamily="2" charset="0"/>
-              </a:rPr>
-              <a:t>I know You will</a:t>
-            </a:r>
           </a:p>
         </p:txBody>
       </p:sp>
@@ -4117,123 +4232,6 @@
 </file>
 
 <file path=ppt/slides/slide4.xml><?xml version="1.0" encoding="utf-8"?>
-<p:sld xmlns:a="http://schemas.openxmlformats.org/drawingml/2006/main" xmlns:r="http://schemas.openxmlformats.org/officeDocument/2006/relationships" xmlns:p="http://schemas.openxmlformats.org/presentationml/2006/main">
-  <p:cSld>
-    <p:bg>
-      <p:bgPr>
-        <a:solidFill>
-          <a:schemeClr val="accent5">
-            <a:lumMod val="50000"/>
-          </a:schemeClr>
-        </a:solidFill>
-        <a:effectLst/>
-      </p:bgPr>
-    </p:bg>
-    <p:spTree>
-      <p:nvGrpSpPr>
-        <p:cNvPr id="1" name="">
-          <a:extLst>
-            <a:ext uri="{FF2B5EF4-FFF2-40B4-BE49-F238E27FC236}">
-              <a16:creationId xmlns:a16="http://schemas.microsoft.com/office/drawing/2014/main" id="{1F58F534-BD3B-C786-3F04-3174DD888286}"/>
-            </a:ext>
-          </a:extLst>
-        </p:cNvPr>
-        <p:cNvGrpSpPr/>
-        <p:nvPr/>
-      </p:nvGrpSpPr>
-      <p:grpSpPr>
-        <a:xfrm>
-          <a:off x="0" y="0"/>
-          <a:ext cx="0" cy="0"/>
-          <a:chOff x="0" y="0"/>
-          <a:chExt cx="0" cy="0"/>
-        </a:xfrm>
-      </p:grpSpPr>
-      <p:sp>
-        <p:nvSpPr>
-          <p:cNvPr id="3" name="Subtitle 2">
-            <a:extLst>
-              <a:ext uri="{FF2B5EF4-FFF2-40B4-BE49-F238E27FC236}">
-                <a16:creationId xmlns:a16="http://schemas.microsoft.com/office/drawing/2014/main" id="{1A594E5C-EC58-3394-0A81-1627A1CB2A80}"/>
-              </a:ext>
-            </a:extLst>
-          </p:cNvPr>
-          <p:cNvSpPr>
-            <a:spLocks noGrp="1"/>
-          </p:cNvSpPr>
-          <p:nvPr>
-            <p:ph type="subTitle" idx="1"/>
-          </p:nvPr>
-        </p:nvSpPr>
-        <p:spPr>
-          <a:xfrm>
-            <a:off x="682831" y="497702"/>
-            <a:ext cx="10826338" cy="5862596"/>
-          </a:xfrm>
-        </p:spPr>
-        <p:txBody>
-          <a:bodyPr>
-            <a:noAutofit/>
-          </a:bodyPr>
-          <a:lstStyle/>
-          <a:p>
-            <a:endParaRPr lang="en-US" sz="4400" dirty="0">
-              <a:solidFill>
-                <a:schemeClr val="bg1"/>
-              </a:solidFill>
-              <a:latin typeface="Avenir Medium" panose="02000503020000020003" pitchFamily="2" charset="0"/>
-              <a:ea typeface="Bodoni Ornaments" pitchFamily="2" charset="0"/>
-            </a:endParaRPr>
-          </a:p>
-          <a:p>
-            <a:endParaRPr lang="en-US" sz="4400" dirty="0">
-              <a:solidFill>
-                <a:schemeClr val="bg1"/>
-              </a:solidFill>
-              <a:latin typeface="Avenir Medium" panose="02000503020000020003" pitchFamily="2" charset="0"/>
-              <a:ea typeface="Bodoni Ornaments" pitchFamily="2" charset="0"/>
-            </a:endParaRPr>
-          </a:p>
-          <a:p>
-            <a:r>
-              <a:rPr lang="en-US" sz="4400" dirty="0">
-                <a:solidFill>
-                  <a:schemeClr val="bg1"/>
-                </a:solidFill>
-                <a:latin typeface="Avenir Medium" panose="02000503020000020003" pitchFamily="2" charset="0"/>
-                <a:ea typeface="Bodoni Ornaments" pitchFamily="2" charset="0"/>
-              </a:rPr>
-              <a:t>All the earth will sing Your praises</a:t>
-            </a:r>
-          </a:p>
-          <a:p>
-            <a:r>
-              <a:rPr lang="en-US" sz="4400" dirty="0">
-                <a:solidFill>
-                  <a:schemeClr val="bg1"/>
-                </a:solidFill>
-                <a:latin typeface="Avenir Medium" panose="02000503020000020003" pitchFamily="2" charset="0"/>
-                <a:ea typeface="Bodoni Ornaments" pitchFamily="2" charset="0"/>
-              </a:rPr>
-              <a:t>All the earth will sing Your Praises</a:t>
-            </a:r>
-          </a:p>
-        </p:txBody>
-      </p:sp>
-    </p:spTree>
-    <p:extLst>
-      <p:ext uri="{BB962C8B-B14F-4D97-AF65-F5344CB8AC3E}">
-        <p14:creationId xmlns:p14="http://schemas.microsoft.com/office/powerpoint/2010/main" val="178381542"/>
-      </p:ext>
-    </p:extLst>
-  </p:cSld>
-  <p:clrMapOvr>
-    <a:masterClrMapping/>
-  </p:clrMapOvr>
-</p:sld>
-</file>
-
-<file path=ppt/slides/slide5.xml><?xml version="1.0" encoding="utf-8"?>
 <p:sld xmlns:a="http://schemas.openxmlformats.org/drawingml/2006/main" xmlns:r="http://schemas.openxmlformats.org/officeDocument/2006/relationships" xmlns:p="http://schemas.openxmlformats.org/presentationml/2006/main">
   <p:cSld>
     <p:bg>
@@ -4304,7 +4302,44 @@
             </a:endParaRPr>
           </a:p>
           <a:p>
-            <a:endParaRPr lang="en-US" sz="4400" dirty="0">
+            <a:pPr algn="l"/>
+            <a:r>
+              <a:rPr lang="en-US" sz="3600" dirty="0">
+                <a:solidFill>
+                  <a:srgbClr val="FFFF00"/>
+                </a:solidFill>
+                <a:latin typeface="Avenir Medium" panose="02000503020000020003" pitchFamily="2" charset="0"/>
+                <a:ea typeface="Bodoni Ornaments" pitchFamily="2" charset="0"/>
+              </a:rPr>
+              <a:t>D                 A                        Bm                     G</a:t>
+            </a:r>
+          </a:p>
+          <a:p>
+            <a:pPr algn="l"/>
+            <a:r>
+              <a:rPr lang="en-US" sz="4400" dirty="0">
+                <a:solidFill>
+                  <a:schemeClr val="bg1"/>
+                </a:solidFill>
+                <a:latin typeface="Avenir Medium" panose="02000503020000020003" pitchFamily="2" charset="0"/>
+                <a:ea typeface="Bodoni Ornaments" pitchFamily="2" charset="0"/>
+              </a:rPr>
+              <a:t>You took, You take our sins away oh God</a:t>
+            </a:r>
+          </a:p>
+          <a:p>
+            <a:pPr algn="l"/>
+            <a:r>
+              <a:rPr lang="en-US" sz="3600" dirty="0">
+                <a:solidFill>
+                  <a:srgbClr val="FFFF00"/>
+                </a:solidFill>
+                <a:latin typeface="Avenir Medium" panose="02000503020000020003" pitchFamily="2" charset="0"/>
+                <a:ea typeface="Bodoni Ornaments" pitchFamily="2" charset="0"/>
+              </a:rPr>
+              <a:t>D                 A                           Bm                    G</a:t>
+            </a:r>
+            <a:endParaRPr lang="en-US" sz="3600" dirty="0">
               <a:solidFill>
                 <a:schemeClr val="bg1"/>
               </a:solidFill>
@@ -4313,18 +4348,7 @@
             </a:endParaRPr>
           </a:p>
           <a:p>
-            <a:r>
-              <a:rPr lang="en-US" sz="4400" dirty="0">
-                <a:solidFill>
-                  <a:schemeClr val="bg1"/>
-                </a:solidFill>
-                <a:latin typeface="Avenir Medium" panose="02000503020000020003" pitchFamily="2" charset="0"/>
-                <a:ea typeface="Bodoni Ornaments" pitchFamily="2" charset="0"/>
-              </a:rPr>
-              <a:t>You took, You take our sins away oh God</a:t>
-            </a:r>
-          </a:p>
-          <a:p>
+            <a:pPr algn="l"/>
             <a:r>
               <a:rPr lang="en-US" sz="4400" dirty="0">
                 <a:solidFill>
@@ -4351,7 +4375,7 @@
 </p:sld>
 </file>
 
-<file path=ppt/slides/slide6.xml><?xml version="1.0" encoding="utf-8"?>
+<file path=ppt/slides/slide5.xml><?xml version="1.0" encoding="utf-8"?>
 <p:sld xmlns:a="http://schemas.openxmlformats.org/drawingml/2006/main" xmlns:r="http://schemas.openxmlformats.org/officeDocument/2006/relationships" xmlns:p="http://schemas.openxmlformats.org/presentationml/2006/main">
   <p:cSld>
     <p:bg>
@@ -4413,6 +4437,185 @@
           </a:bodyPr>
           <a:lstStyle/>
           <a:p>
+            <a:pPr algn="l"/>
+            <a:r>
+              <a:rPr lang="en-US" sz="3600" dirty="0">
+                <a:solidFill>
+                  <a:srgbClr val="FFFF00"/>
+                </a:solidFill>
+                <a:latin typeface="Avenir Medium" panose="02000503020000020003" pitchFamily="2" charset="0"/>
+                <a:ea typeface="Bodoni Ornaments" pitchFamily="2" charset="0"/>
+              </a:rPr>
+              <a:t>Em</a:t>
+            </a:r>
+          </a:p>
+          <a:p>
+            <a:pPr algn="l"/>
+            <a:r>
+              <a:rPr lang="en-US" sz="4400" dirty="0">
+                <a:solidFill>
+                  <a:schemeClr val="bg1"/>
+                </a:solidFill>
+                <a:latin typeface="Avenir Medium" panose="02000503020000020003" pitchFamily="2" charset="0"/>
+                <a:ea typeface="Bodoni Ornaments" pitchFamily="2" charset="0"/>
+              </a:rPr>
+              <a:t>You came down, </a:t>
+            </a:r>
+          </a:p>
+          <a:p>
+            <a:pPr algn="l"/>
+            <a:r>
+              <a:rPr lang="en-US" sz="3600" dirty="0">
+                <a:solidFill>
+                  <a:srgbClr val="FFFF00"/>
+                </a:solidFill>
+                <a:latin typeface="Avenir Medium" panose="02000503020000020003" pitchFamily="2" charset="0"/>
+                <a:ea typeface="Bodoni Ornaments" pitchFamily="2" charset="0"/>
+              </a:rPr>
+              <a:t>                           Bm</a:t>
+            </a:r>
+          </a:p>
+          <a:p>
+            <a:pPr algn="l"/>
+            <a:r>
+              <a:rPr lang="en-US" sz="4400" dirty="0">
+                <a:solidFill>
+                  <a:schemeClr val="bg1"/>
+                </a:solidFill>
+                <a:latin typeface="Avenir Medium" panose="02000503020000020003" pitchFamily="2" charset="0"/>
+                <a:ea typeface="Bodoni Ornaments" pitchFamily="2" charset="0"/>
+              </a:rPr>
+              <a:t>You saved us through the cross</a:t>
+            </a:r>
+          </a:p>
+          <a:p>
+            <a:pPr algn="l"/>
+            <a:r>
+              <a:rPr lang="en-US" sz="3600" dirty="0">
+                <a:solidFill>
+                  <a:srgbClr val="FFFF00"/>
+                </a:solidFill>
+                <a:latin typeface="Avenir Medium" panose="02000503020000020003" pitchFamily="2" charset="0"/>
+                <a:ea typeface="Bodoni Ornaments" pitchFamily="2" charset="0"/>
+              </a:rPr>
+              <a:t>Em</a:t>
+            </a:r>
+          </a:p>
+          <a:p>
+            <a:pPr algn="l"/>
+            <a:r>
+              <a:rPr lang="en-US" sz="4400" dirty="0">
+                <a:solidFill>
+                  <a:schemeClr val="bg1"/>
+                </a:solidFill>
+                <a:latin typeface="Avenir Medium" panose="02000503020000020003" pitchFamily="2" charset="0"/>
+                <a:ea typeface="Bodoni Ornaments" pitchFamily="2" charset="0"/>
+              </a:rPr>
+              <a:t>Our hearts are changed </a:t>
+            </a:r>
+          </a:p>
+          <a:p>
+            <a:pPr algn="l"/>
+            <a:r>
+              <a:rPr lang="en-US" sz="3600" dirty="0">
+                <a:solidFill>
+                  <a:srgbClr val="FFFF00"/>
+                </a:solidFill>
+                <a:latin typeface="Avenir Medium" panose="02000503020000020003" pitchFamily="2" charset="0"/>
+                <a:ea typeface="Bodoni Ornaments" pitchFamily="2" charset="0"/>
+              </a:rPr>
+              <a:t>                       G                   A</a:t>
+            </a:r>
+          </a:p>
+          <a:p>
+            <a:pPr algn="l"/>
+            <a:r>
+              <a:rPr lang="en-US" sz="4400" dirty="0">
+                <a:solidFill>
+                  <a:schemeClr val="bg1"/>
+                </a:solidFill>
+                <a:latin typeface="Avenir Medium" panose="02000503020000020003" pitchFamily="2" charset="0"/>
+                <a:ea typeface="Bodoni Ornaments" pitchFamily="2" charset="0"/>
+              </a:rPr>
+              <a:t>because of Your great love</a:t>
+            </a:r>
+          </a:p>
+        </p:txBody>
+      </p:sp>
+    </p:spTree>
+    <p:extLst>
+      <p:ext uri="{BB962C8B-B14F-4D97-AF65-F5344CB8AC3E}">
+        <p14:creationId xmlns:p14="http://schemas.microsoft.com/office/powerpoint/2010/main" val="506020479"/>
+      </p:ext>
+    </p:extLst>
+  </p:cSld>
+  <p:clrMapOvr>
+    <a:masterClrMapping/>
+  </p:clrMapOvr>
+</p:sld>
+</file>
+
+<file path=ppt/slides/slide6.xml><?xml version="1.0" encoding="utf-8"?>
+<p:sld xmlns:a="http://schemas.openxmlformats.org/drawingml/2006/main" xmlns:r="http://schemas.openxmlformats.org/officeDocument/2006/relationships" xmlns:p="http://schemas.openxmlformats.org/presentationml/2006/main">
+  <p:cSld>
+    <p:bg>
+      <p:bgPr>
+        <a:solidFill>
+          <a:schemeClr val="accent5">
+            <a:lumMod val="50000"/>
+          </a:schemeClr>
+        </a:solidFill>
+        <a:effectLst/>
+      </p:bgPr>
+    </p:bg>
+    <p:spTree>
+      <p:nvGrpSpPr>
+        <p:cNvPr id="1" name="">
+          <a:extLst>
+            <a:ext uri="{FF2B5EF4-FFF2-40B4-BE49-F238E27FC236}">
+              <a16:creationId xmlns:a16="http://schemas.microsoft.com/office/drawing/2014/main" id="{A6EB3CB0-F136-9D28-1443-EEDD557BBE74}"/>
+            </a:ext>
+          </a:extLst>
+        </p:cNvPr>
+        <p:cNvGrpSpPr/>
+        <p:nvPr/>
+      </p:nvGrpSpPr>
+      <p:grpSpPr>
+        <a:xfrm>
+          <a:off x="0" y="0"/>
+          <a:ext cx="0" cy="0"/>
+          <a:chOff x="0" y="0"/>
+          <a:chExt cx="0" cy="0"/>
+        </a:xfrm>
+      </p:grpSpPr>
+      <p:sp>
+        <p:nvSpPr>
+          <p:cNvPr id="3" name="Subtitle 2">
+            <a:extLst>
+              <a:ext uri="{FF2B5EF4-FFF2-40B4-BE49-F238E27FC236}">
+                <a16:creationId xmlns:a16="http://schemas.microsoft.com/office/drawing/2014/main" id="{07445891-91A4-9749-9DC9-847A62F814B1}"/>
+              </a:ext>
+            </a:extLst>
+          </p:cNvPr>
+          <p:cNvSpPr>
+            <a:spLocks noGrp="1"/>
+          </p:cNvSpPr>
+          <p:nvPr>
+            <p:ph type="subTitle" idx="1"/>
+          </p:nvPr>
+        </p:nvSpPr>
+        <p:spPr>
+          <a:xfrm>
+            <a:off x="682831" y="497702"/>
+            <a:ext cx="10826338" cy="5862596"/>
+          </a:xfrm>
+        </p:spPr>
+        <p:txBody>
+          <a:bodyPr>
+            <a:noAutofit/>
+          </a:bodyPr>
+          <a:lstStyle/>
+          <a:p>
             <a:endParaRPr lang="en-US" sz="4400" dirty="0">
               <a:solidFill>
                 <a:schemeClr val="bg1"/>
@@ -4422,7 +4625,44 @@
             </a:endParaRPr>
           </a:p>
           <a:p>
-            <a:endParaRPr lang="en-US" sz="4400" dirty="0">
+            <a:pPr algn="l"/>
+            <a:r>
+              <a:rPr lang="en-US" sz="3600" dirty="0">
+                <a:solidFill>
+                  <a:srgbClr val="FFFF00"/>
+                </a:solidFill>
+                <a:latin typeface="Avenir Medium" panose="02000503020000020003" pitchFamily="2" charset="0"/>
+                <a:ea typeface="Bodoni Ornaments" pitchFamily="2" charset="0"/>
+              </a:rPr>
+              <a:t>D                 A</a:t>
+            </a:r>
+          </a:p>
+          <a:p>
+            <a:pPr algn="l"/>
+            <a:r>
+              <a:rPr lang="en-US" sz="4400" dirty="0">
+                <a:solidFill>
+                  <a:schemeClr val="bg1"/>
+                </a:solidFill>
+                <a:latin typeface="Avenir Medium" panose="02000503020000020003" pitchFamily="2" charset="0"/>
+                <a:ea typeface="Bodoni Ornaments" pitchFamily="2" charset="0"/>
+              </a:rPr>
+              <a:t>You lived, You died, </a:t>
+            </a:r>
+          </a:p>
+          <a:p>
+            <a:pPr algn="l"/>
+            <a:r>
+              <a:rPr lang="en-US" sz="3600" dirty="0">
+                <a:solidFill>
+                  <a:srgbClr val="FFFF00"/>
+                </a:solidFill>
+                <a:latin typeface="Avenir Medium" panose="02000503020000020003" pitchFamily="2" charset="0"/>
+                <a:ea typeface="Bodoni Ornaments" pitchFamily="2" charset="0"/>
+              </a:rPr>
+              <a:t>Bm                 G                                         D</a:t>
+            </a:r>
+            <a:endParaRPr lang="en-US" sz="3600" dirty="0">
               <a:solidFill>
                 <a:schemeClr val="bg1"/>
               </a:solidFill>
@@ -4431,6 +4671,7 @@
             </a:endParaRPr>
           </a:p>
           <a:p>
+            <a:pPr algn="l"/>
             <a:r>
               <a:rPr lang="en-US" sz="4400" dirty="0">
                 <a:solidFill>
@@ -4439,34 +4680,41 @@
                 <a:latin typeface="Avenir Medium" panose="02000503020000020003" pitchFamily="2" charset="0"/>
                 <a:ea typeface="Bodoni Ornaments" pitchFamily="2" charset="0"/>
               </a:rPr>
-              <a:t>You came down, </a:t>
-            </a:r>
-          </a:p>
-          <a:p>
+              <a:t>You said in three days You would rise</a:t>
+            </a:r>
+          </a:p>
+          <a:p>
+            <a:pPr algn="l"/>
             <a:r>
               <a:rPr lang="en-US" sz="4400" dirty="0">
                 <a:solidFill>
-                  <a:schemeClr val="bg1"/>
+                  <a:srgbClr val="FFFF00"/>
                 </a:solidFill>
                 <a:latin typeface="Avenir Medium" panose="02000503020000020003" pitchFamily="2" charset="0"/>
                 <a:ea typeface="Bodoni Ornaments" pitchFamily="2" charset="0"/>
               </a:rPr>
-              <a:t>You saved us through the cross</a:t>
-            </a:r>
-          </a:p>
-          <a:p>
-            <a:r>
-              <a:rPr lang="en-US" sz="4400" dirty="0">
-                <a:solidFill>
-                  <a:schemeClr val="bg1"/>
+              <a:t>       </a:t>
+            </a:r>
+            <a:r>
+              <a:rPr lang="en-US" sz="3600" dirty="0">
+                <a:solidFill>
+                  <a:srgbClr val="FFFF00"/>
                 </a:solidFill>
                 <a:latin typeface="Avenir Medium" panose="02000503020000020003" pitchFamily="2" charset="0"/>
                 <a:ea typeface="Bodoni Ornaments" pitchFamily="2" charset="0"/>
               </a:rPr>
-              <a:t>Our hearts are changed </a:t>
-            </a:r>
-          </a:p>
-          <a:p>
+              <a:t>A                           Bm     D</a:t>
+            </a:r>
+            <a:endParaRPr lang="en-US" sz="3600" dirty="0">
+              <a:solidFill>
+                <a:schemeClr val="bg1"/>
+              </a:solidFill>
+              <a:latin typeface="Avenir Medium" panose="02000503020000020003" pitchFamily="2" charset="0"/>
+              <a:ea typeface="Bodoni Ornaments" pitchFamily="2" charset="0"/>
+            </a:endParaRPr>
+          </a:p>
+          <a:p>
+            <a:pPr algn="l"/>
             <a:r>
               <a:rPr lang="en-US" sz="4400" dirty="0">
                 <a:solidFill>
@@ -4475,7 +4723,7 @@
                 <a:latin typeface="Avenir Medium" panose="02000503020000020003" pitchFamily="2" charset="0"/>
                 <a:ea typeface="Bodoni Ornaments" pitchFamily="2" charset="0"/>
               </a:rPr>
-              <a:t>because of Your great love</a:t>
+              <a:t>You did, You're alive</a:t>
             </a:r>
           </a:p>
         </p:txBody>
@@ -4483,7 +4731,7 @@
     </p:spTree>
     <p:extLst>
       <p:ext uri="{BB962C8B-B14F-4D97-AF65-F5344CB8AC3E}">
-        <p14:creationId xmlns:p14="http://schemas.microsoft.com/office/powerpoint/2010/main" val="506020479"/>
+        <p14:creationId xmlns:p14="http://schemas.microsoft.com/office/powerpoint/2010/main" val="3770882305"/>
       </p:ext>
     </p:extLst>
   </p:cSld>
@@ -4511,7 +4759,7 @@
         <p:cNvPr id="1" name="">
           <a:extLst>
             <a:ext uri="{FF2B5EF4-FFF2-40B4-BE49-F238E27FC236}">
-              <a16:creationId xmlns:a16="http://schemas.microsoft.com/office/drawing/2014/main" id="{A9DF43CD-1884-EBFD-29E5-555E66B284EF}"/>
+              <a16:creationId xmlns:a16="http://schemas.microsoft.com/office/drawing/2014/main" id="{ED42577D-9DFE-CCBB-7FF3-759CA54C304D}"/>
             </a:ext>
           </a:extLst>
         </p:cNvPr>
@@ -4531,7 +4779,7 @@
           <p:cNvPr id="3" name="Subtitle 2">
             <a:extLst>
               <a:ext uri="{FF2B5EF4-FFF2-40B4-BE49-F238E27FC236}">
-                <a16:creationId xmlns:a16="http://schemas.microsoft.com/office/drawing/2014/main" id="{4847D670-ECFB-2098-2E2E-19743E976A84}"/>
+                <a16:creationId xmlns:a16="http://schemas.microsoft.com/office/drawing/2014/main" id="{E816AFBB-5648-A412-12B5-AAF9153AE4A2}"/>
               </a:ext>
             </a:extLst>
           </p:cNvPr>
@@ -4554,6 +4802,17 @@
           </a:bodyPr>
           <a:lstStyle/>
           <a:p>
+            <a:pPr algn="l"/>
+            <a:r>
+              <a:rPr lang="en-US" sz="4400" dirty="0">
+                <a:solidFill>
+                  <a:srgbClr val="FFFF00"/>
+                </a:solidFill>
+                <a:latin typeface="Avenir Medium" panose="02000503020000020003" pitchFamily="2" charset="0"/>
+                <a:ea typeface="Bodoni Ornaments" pitchFamily="2" charset="0"/>
+              </a:rPr>
+              <a:t>D             A</a:t>
+            </a:r>
             <a:endParaRPr lang="en-US" sz="4400" dirty="0">
               <a:solidFill>
                 <a:schemeClr val="bg1"/>
@@ -4563,6 +4822,30 @@
             </a:endParaRPr>
           </a:p>
           <a:p>
+            <a:pPr algn="l"/>
+            <a:r>
+              <a:rPr lang="en-US" sz="4400" dirty="0">
+                <a:solidFill>
+                  <a:schemeClr val="bg1"/>
+                </a:solidFill>
+                <a:latin typeface="Avenir Medium" panose="02000503020000020003" pitchFamily="2" charset="0"/>
+                <a:ea typeface="Bodoni Ornaments" pitchFamily="2" charset="0"/>
+              </a:rPr>
+              <a:t>You rule, You reign</a:t>
+            </a:r>
+          </a:p>
+          <a:p>
+            <a:pPr algn="l"/>
+            <a:r>
+              <a:rPr lang="en-US" sz="4400" dirty="0">
+                <a:solidFill>
+                  <a:srgbClr val="FFFF00"/>
+                </a:solidFill>
+                <a:latin typeface="Avenir Medium" panose="02000503020000020003" pitchFamily="2" charset="0"/>
+                <a:ea typeface="Bodoni Ornaments" pitchFamily="2" charset="0"/>
+              </a:rPr>
+              <a:t>Bm                    G</a:t>
+            </a:r>
             <a:endParaRPr lang="en-US" sz="4400" dirty="0">
               <a:solidFill>
                 <a:schemeClr val="bg1"/>
@@ -4572,6 +4855,7 @@
             </a:endParaRPr>
           </a:p>
           <a:p>
+            <a:pPr algn="l"/>
             <a:r>
               <a:rPr lang="en-US" sz="4400" dirty="0">
                 <a:solidFill>
@@ -4580,109 +4864,21 @@
                 <a:latin typeface="Avenir Medium" panose="02000503020000020003" pitchFamily="2" charset="0"/>
                 <a:ea typeface="Bodoni Ornaments" pitchFamily="2" charset="0"/>
               </a:rPr>
-              <a:t>You lived, You died, </a:t>
-            </a:r>
-          </a:p>
-          <a:p>
+              <a:t>You said You're coming back again</a:t>
+            </a:r>
+          </a:p>
+          <a:p>
+            <a:pPr algn="l"/>
             <a:r>
               <a:rPr lang="en-US" sz="4400" dirty="0">
                 <a:solidFill>
-                  <a:schemeClr val="bg1"/>
+                  <a:srgbClr val="FFFF00"/>
                 </a:solidFill>
                 <a:latin typeface="Avenir Medium" panose="02000503020000020003" pitchFamily="2" charset="0"/>
                 <a:ea typeface="Bodoni Ornaments" pitchFamily="2" charset="0"/>
               </a:rPr>
-              <a:t>You said in three days You would rise</a:t>
-            </a:r>
-          </a:p>
-          <a:p>
-            <a:r>
-              <a:rPr lang="en-US" sz="4400" dirty="0">
-                <a:solidFill>
-                  <a:schemeClr val="bg1"/>
-                </a:solidFill>
-                <a:latin typeface="Avenir Medium" panose="02000503020000020003" pitchFamily="2" charset="0"/>
-                <a:ea typeface="Bodoni Ornaments" pitchFamily="2" charset="0"/>
-              </a:rPr>
-              <a:t>You did, You're alive</a:t>
-            </a:r>
-          </a:p>
-        </p:txBody>
-      </p:sp>
-    </p:spTree>
-    <p:extLst>
-      <p:ext uri="{BB962C8B-B14F-4D97-AF65-F5344CB8AC3E}">
-        <p14:creationId xmlns:p14="http://schemas.microsoft.com/office/powerpoint/2010/main" val="1414325206"/>
-      </p:ext>
-    </p:extLst>
-  </p:cSld>
-  <p:clrMapOvr>
-    <a:masterClrMapping/>
-  </p:clrMapOvr>
-</p:sld>
-</file>
-
-<file path=ppt/slides/slide8.xml><?xml version="1.0" encoding="utf-8"?>
-<p:sld xmlns:a="http://schemas.openxmlformats.org/drawingml/2006/main" xmlns:r="http://schemas.openxmlformats.org/officeDocument/2006/relationships" xmlns:p="http://schemas.openxmlformats.org/presentationml/2006/main">
-  <p:cSld>
-    <p:bg>
-      <p:bgPr>
-        <a:solidFill>
-          <a:schemeClr val="accent5">
-            <a:lumMod val="50000"/>
-          </a:schemeClr>
-        </a:solidFill>
-        <a:effectLst/>
-      </p:bgPr>
-    </p:bg>
-    <p:spTree>
-      <p:nvGrpSpPr>
-        <p:cNvPr id="1" name="">
-          <a:extLst>
-            <a:ext uri="{FF2B5EF4-FFF2-40B4-BE49-F238E27FC236}">
-              <a16:creationId xmlns:a16="http://schemas.microsoft.com/office/drawing/2014/main" id="{F8AF5FE5-36CE-43C5-38B9-5D3ABC38BDEE}"/>
-            </a:ext>
-          </a:extLst>
-        </p:cNvPr>
-        <p:cNvGrpSpPr/>
-        <p:nvPr/>
-      </p:nvGrpSpPr>
-      <p:grpSpPr>
-        <a:xfrm>
-          <a:off x="0" y="0"/>
-          <a:ext cx="0" cy="0"/>
-          <a:chOff x="0" y="0"/>
-          <a:chExt cx="0" cy="0"/>
-        </a:xfrm>
-      </p:grpSpPr>
-      <p:sp>
-        <p:nvSpPr>
-          <p:cNvPr id="3" name="Subtitle 2">
-            <a:extLst>
-              <a:ext uri="{FF2B5EF4-FFF2-40B4-BE49-F238E27FC236}">
-                <a16:creationId xmlns:a16="http://schemas.microsoft.com/office/drawing/2014/main" id="{52533981-563A-172C-1518-B57BDB3722E9}"/>
-              </a:ext>
-            </a:extLst>
-          </p:cNvPr>
-          <p:cNvSpPr>
-            <a:spLocks noGrp="1"/>
-          </p:cNvSpPr>
-          <p:nvPr>
-            <p:ph type="subTitle" idx="1"/>
-          </p:nvPr>
-        </p:nvSpPr>
-        <p:spPr>
-          <a:xfrm>
-            <a:off x="682831" y="497702"/>
-            <a:ext cx="10826338" cy="5862596"/>
-          </a:xfrm>
-        </p:spPr>
-        <p:txBody>
-          <a:bodyPr>
-            <a:noAutofit/>
-          </a:bodyPr>
-          <a:lstStyle/>
-          <a:p>
+              <a:t>D         A</a:t>
+            </a:r>
             <a:endParaRPr lang="en-US" sz="4400" dirty="0">
               <a:solidFill>
                 <a:schemeClr val="bg1"/>
@@ -4692,6 +4888,30 @@
             </a:endParaRPr>
           </a:p>
           <a:p>
+            <a:pPr algn="l"/>
+            <a:r>
+              <a:rPr lang="en-US" sz="4400" dirty="0">
+                <a:solidFill>
+                  <a:schemeClr val="bg1"/>
+                </a:solidFill>
+                <a:latin typeface="Avenir Medium" panose="02000503020000020003" pitchFamily="2" charset="0"/>
+                <a:ea typeface="Bodoni Ornaments" pitchFamily="2" charset="0"/>
+              </a:rPr>
+              <a:t>I know You will</a:t>
+            </a:r>
+          </a:p>
+          <a:p>
+            <a:pPr algn="l"/>
+            <a:r>
+              <a:rPr lang="en-US" sz="4400" dirty="0">
+                <a:solidFill>
+                  <a:srgbClr val="FFFF00"/>
+                </a:solidFill>
+                <a:latin typeface="Avenir Medium" panose="02000503020000020003" pitchFamily="2" charset="0"/>
+                <a:ea typeface="Bodoni Ornaments" pitchFamily="2" charset="0"/>
+              </a:rPr>
+              <a:t>Em                      G                      D A Bm G</a:t>
+            </a:r>
             <a:endParaRPr lang="en-US" sz="4400" dirty="0">
               <a:solidFill>
                 <a:schemeClr val="bg1"/>
@@ -4701,6 +4921,7 @@
             </a:endParaRPr>
           </a:p>
           <a:p>
+            <a:pPr algn="l"/>
             <a:r>
               <a:rPr lang="en-US" sz="4400" dirty="0">
                 <a:solidFill>
@@ -4709,109 +4930,11 @@
                 <a:latin typeface="Avenir Medium" panose="02000503020000020003" pitchFamily="2" charset="0"/>
                 <a:ea typeface="Bodoni Ornaments" pitchFamily="2" charset="0"/>
               </a:rPr>
-              <a:t>You rule, You reign</a:t>
-            </a:r>
-          </a:p>
-          <a:p>
-            <a:r>
-              <a:rPr lang="en-US" sz="4400" dirty="0">
-                <a:solidFill>
-                  <a:schemeClr val="bg1"/>
-                </a:solidFill>
-                <a:latin typeface="Avenir Medium" panose="02000503020000020003" pitchFamily="2" charset="0"/>
-                <a:ea typeface="Bodoni Ornaments" pitchFamily="2" charset="0"/>
-              </a:rPr>
-              <a:t>You said You're coming back again</a:t>
-            </a:r>
-          </a:p>
-          <a:p>
-            <a:r>
-              <a:rPr lang="en-US" sz="4400" dirty="0">
-                <a:solidFill>
-                  <a:schemeClr val="bg1"/>
-                </a:solidFill>
-                <a:latin typeface="Avenir Medium" panose="02000503020000020003" pitchFamily="2" charset="0"/>
-                <a:ea typeface="Bodoni Ornaments" pitchFamily="2" charset="0"/>
-              </a:rPr>
-              <a:t>I know You will</a:t>
-            </a:r>
-          </a:p>
-        </p:txBody>
-      </p:sp>
-    </p:spTree>
-    <p:extLst>
-      <p:ext uri="{BB962C8B-B14F-4D97-AF65-F5344CB8AC3E}">
-        <p14:creationId xmlns:p14="http://schemas.microsoft.com/office/powerpoint/2010/main" val="903008385"/>
-      </p:ext>
-    </p:extLst>
-  </p:cSld>
-  <p:clrMapOvr>
-    <a:masterClrMapping/>
-  </p:clrMapOvr>
-</p:sld>
-</file>
-
-<file path=ppt/slides/slide9.xml><?xml version="1.0" encoding="utf-8"?>
-<p:sld xmlns:a="http://schemas.openxmlformats.org/drawingml/2006/main" xmlns:r="http://schemas.openxmlformats.org/officeDocument/2006/relationships" xmlns:p="http://schemas.openxmlformats.org/presentationml/2006/main">
-  <p:cSld>
-    <p:bg>
-      <p:bgPr>
-        <a:solidFill>
-          <a:schemeClr val="accent5">
-            <a:lumMod val="50000"/>
-          </a:schemeClr>
-        </a:solidFill>
-        <a:effectLst/>
-      </p:bgPr>
-    </p:bg>
-    <p:spTree>
-      <p:nvGrpSpPr>
-        <p:cNvPr id="1" name="">
-          <a:extLst>
-            <a:ext uri="{FF2B5EF4-FFF2-40B4-BE49-F238E27FC236}">
-              <a16:creationId xmlns:a16="http://schemas.microsoft.com/office/drawing/2014/main" id="{D2AC53EA-3CCC-76B2-828B-6FE7AE111938}"/>
-            </a:ext>
-          </a:extLst>
-        </p:cNvPr>
-        <p:cNvGrpSpPr/>
-        <p:nvPr/>
-      </p:nvGrpSpPr>
-      <p:grpSpPr>
-        <a:xfrm>
-          <a:off x="0" y="0"/>
-          <a:ext cx="0" cy="0"/>
-          <a:chOff x="0" y="0"/>
-          <a:chExt cx="0" cy="0"/>
-        </a:xfrm>
-      </p:grpSpPr>
-      <p:sp>
-        <p:nvSpPr>
-          <p:cNvPr id="3" name="Subtitle 2">
-            <a:extLst>
-              <a:ext uri="{FF2B5EF4-FFF2-40B4-BE49-F238E27FC236}">
-                <a16:creationId xmlns:a16="http://schemas.microsoft.com/office/drawing/2014/main" id="{49E97EA2-FB21-19A5-9DF8-349C0EB8220C}"/>
-              </a:ext>
-            </a:extLst>
-          </p:cNvPr>
-          <p:cNvSpPr>
-            <a:spLocks noGrp="1"/>
-          </p:cNvSpPr>
-          <p:nvPr>
-            <p:ph type="subTitle" idx="1"/>
-          </p:nvPr>
-        </p:nvSpPr>
-        <p:spPr>
-          <a:xfrm>
-            <a:off x="682831" y="497702"/>
-            <a:ext cx="10826338" cy="5862596"/>
-          </a:xfrm>
-        </p:spPr>
-        <p:txBody>
-          <a:bodyPr>
-            <a:noAutofit/>
-          </a:bodyPr>
-          <a:lstStyle/>
-          <a:p>
+              <a:t>All the earth will sing Your praises</a:t>
+            </a:r>
+          </a:p>
+          <a:p>
+            <a:pPr algn="l"/>
             <a:endParaRPr lang="en-US" sz="4400" dirty="0">
               <a:solidFill>
                 <a:schemeClr val="bg1"/>
@@ -4820,45 +4943,12 @@
               <a:ea typeface="Bodoni Ornaments" pitchFamily="2" charset="0"/>
             </a:endParaRPr>
           </a:p>
-          <a:p>
-            <a:endParaRPr lang="en-US" sz="4400" dirty="0">
-              <a:solidFill>
-                <a:schemeClr val="bg1"/>
-              </a:solidFill>
-              <a:latin typeface="Avenir Medium" panose="02000503020000020003" pitchFamily="2" charset="0"/>
-              <a:ea typeface="Bodoni Ornaments" pitchFamily="2" charset="0"/>
-            </a:endParaRPr>
-          </a:p>
-          <a:p>
-            <a:r>
-              <a:rPr lang="en-US" sz="4400" dirty="0">
-                <a:solidFill>
-                  <a:schemeClr val="bg1"/>
-                </a:solidFill>
-                <a:latin typeface="Avenir Medium" panose="02000503020000020003" pitchFamily="2" charset="0"/>
-                <a:ea typeface="Bodoni Ornaments" pitchFamily="2" charset="0"/>
-              </a:rPr>
-              <a:t>All the earth will sing Your praises</a:t>
-            </a:r>
-          </a:p>
-          <a:p>
-            <a:r>
-              <a:rPr lang="en-US" sz="4400" dirty="0">
-                <a:solidFill>
-                  <a:schemeClr val="bg1"/>
-                </a:solidFill>
-                <a:latin typeface="Avenir Medium" panose="02000503020000020003" pitchFamily="2" charset="0"/>
-                <a:ea typeface="Bodoni Ornaments" pitchFamily="2" charset="0"/>
-              </a:rPr>
-              <a:t>All the earth will sing Your Praises</a:t>
-            </a:r>
-          </a:p>
         </p:txBody>
       </p:sp>
     </p:spTree>
     <p:extLst>
       <p:ext uri="{BB962C8B-B14F-4D97-AF65-F5344CB8AC3E}">
-        <p14:creationId xmlns:p14="http://schemas.microsoft.com/office/powerpoint/2010/main" val="1400474458"/>
+        <p14:creationId xmlns:p14="http://schemas.microsoft.com/office/powerpoint/2010/main" val="3590520116"/>
       </p:ext>
     </p:extLst>
   </p:cSld>
